--- a/My 3 ideas.pptx
+++ b/My 3 ideas.pptx
@@ -920,8 +920,8 @@
         </p:nvSpPr>
         <p:spPr>
           <a:xfrm>
-            <a:off x="457200" y="1188720"/>
-            <a:ext cx="2651760" cy="914400"/>
+            <a:off x="195492" y="365760"/>
+            <a:ext cx="2913468" cy="2286000"/>
           </a:xfrm>
           <a:prstGeom prst="rect">
             <a:avLst/>
@@ -937,7 +937,7 @@
               <a:buNone/>
             </a:pPr>
             <a:r>
-              <a:rPr lang="en-US" sz="5400" b="1" dirty="0">
+              <a:rPr lang="en-US" sz="3200" b="1" dirty="0">
                 <a:solidFill>
                   <a:srgbClr val="FFFFFF"/>
                 </a:solidFill>
@@ -945,9 +945,9 @@
                 <a:ea typeface="Cambria" pitchFamily="34" charset="-122"/>
                 <a:cs typeface="Cambria" pitchFamily="34" charset="-120"/>
               </a:rPr>
-              <a:t>Rasin</a:t>
-            </a:r>
-            <a:endParaRPr lang="en-US" sz="5400" dirty="0"/>
+              <a:t>AI-Tax Categorization</a:t>
+            </a:r>
+            <a:endParaRPr lang="en-US" sz="3200" dirty="0"/>
           </a:p>
         </p:txBody>
       </p:sp>
@@ -1129,7 +1129,7 @@
                 <a:ea typeface="Calibri" pitchFamily="34" charset="-122"/>
                 <a:cs typeface="Calibri" pitchFamily="34" charset="-120"/>
               </a:rPr>
-              <a:t>Solo consultants and micro-agencies (1-5 people).</a:t>
+              <a:t>Solo consultants and small-businesses (1-5 people).</a:t>
             </a:r>
             <a:endParaRPr lang="en-US" sz="1500" dirty="0"/>
           </a:p>
@@ -1776,7 +1776,7 @@
               <a:buNone/>
             </a:pPr>
             <a:r>
-              <a:rPr lang="en-US" sz="3000" b="1" dirty="0">
+              <a:rPr lang="en-US" sz="3000" b="1">
                 <a:solidFill>
                   <a:srgbClr val="1F2933"/>
                 </a:solidFill>
@@ -1784,7 +1784,18 @@
                 <a:ea typeface="Cambria" pitchFamily="34" charset="-122"/>
                 <a:cs typeface="Cambria" pitchFamily="34" charset="-120"/>
               </a:rPr>
-              <a:t>Rasin, in more detail</a:t>
+              <a:t>In </a:t>
+            </a:r>
+            <a:r>
+              <a:rPr lang="en-US" sz="3000" b="1" dirty="0">
+                <a:solidFill>
+                  <a:srgbClr val="1F2933"/>
+                </a:solidFill>
+                <a:latin typeface="Cambria" pitchFamily="34" charset="0"/>
+                <a:ea typeface="Cambria" pitchFamily="34" charset="-122"/>
+                <a:cs typeface="Cambria" pitchFamily="34" charset="-120"/>
+              </a:rPr>
+              <a:t>more detail</a:t>
             </a:r>
             <a:endParaRPr lang="en-US" sz="3000" dirty="0"/>
           </a:p>
